--- a/dads-a4-template/dist/DADS_A4_Portrait_Template.pptx
+++ b/dads-a4-template/dist/DADS_A4_Portrait_Template.pptx
@@ -5861,7 +5861,7 @@
                 <a:ea typeface="+mn-ea"/>
                 <a:cs typeface="+mn-cs"/>
               </a:rPr>
-              <a:t>14pt（DADSの14 CSS px）未満のサイズは使用しません。</a:t>
+              <a:t>DADSの14 CSS px 未満のサイズは使用しません。</a:t>
             </a:r>
           </a:p>
           <a:p>
